--- a/site/clases/parte-7-etica-fairness-privacidad/227-gdpr-y-ai-act-eu/clase-227-gdpr-y-ai-act-eu-presentacion.pptx
+++ b/site/clases/parte-7-etica-fairness-privacidad/227-gdpr-y-ai-act-eu/clase-227-gdpr-y-ai-act-eu-presentacion.pptx
@@ -3272,7 +3272,7 @@
                 </a:solidFill>
                 <a:latin typeface="Segoe UI"/>
               </a:rPr>
-              <a:t>Parte: 7 — Ética, Fairness y Privacidad · Fuente: Reglamento UE 2016/679 (GDPR) + Reglamento UE 2024/1689 (AI Act).  Duración estimada: 75 min.</a:t>
+              <a:t>Parte: 7 — Ética, Fairness y Privacidad · Fuente: Reglamento UE 2016/679 (GDPR) + Reglamento UE 2024/1689 (AI Act).  Duración estimada: 75 min. · Nivel: Intermedio-Avanzado</a:t>
             </a:r>
           </a:p>
         </p:txBody>
@@ -3581,7 +3581,7 @@
                 </a:solidFill>
                 <a:latin typeface="Segoe UI"/>
               </a:rPr>
-              <a:t>Parte: 7 — Ética, Fairness y Privacidad · Fuente: Reglamento UE 2016/679 (GDPR) + Reglamento UE 2024/1689 (AI Act).  Duración estimada: 75 min.</a:t>
+              <a:t>Parte: 7 — Ética, Fairness y Privacidad · Fuente: Reglamento UE 2016/679 (GDPR) + Reglamento UE 2024/1689 (AI Act).  Duración estimada: 75 min. · Nivel: Intermedio-Avanzado</a:t>
             </a:r>
           </a:p>
         </p:txBody>
